--- a/20261020_株式会社横浜シミズ御中_LINE公式アカウント運用のご提案.pptx
+++ b/20261020_株式会社横浜シミズ御中_LINE公式アカウント運用のご提案.pptx
@@ -3198,7 +3198,7 @@
                 <a:ea typeface="メイリオ"/>
                 <a:cs typeface="メイリオ"/>
               </a:rPr>
-              <a:t>神奈川・静岡全域のイベント会場で、運営・警備・設営を担う、登録制アルバイトの会社です。</a:t>
+              <a:t>登録制のアルバイトスタッフとともに、神奈川・静岡全域のイベント会場の運営・警備・設営を担う会社です。</a:t>
             </a:r>
           </a:p>
           <a:p>
@@ -3538,7 +3538,7 @@
                 <a:latin typeface="メイリオ" panose="020B0604030504040204" pitchFamily="50" charset="-128"/>
                 <a:ea typeface="メイリオ" panose="020B0604030504040204" pitchFamily="50" charset="-128"/>
               </a:rPr>
-              <a:t>・アルバイトは登録制。勤務できる日を自己申告し、</a:t>
+              <a:t>・アルバイトは登録制。都合の良い日に勤務できる</a:t>
             </a:r>
             <a:br>
               <a:rPr lang="ja-JP" altLang="en-US" sz="1200" b="0" dirty="0">
@@ -3557,7 +3557,7 @@
                 <a:latin typeface="メイリオ" panose="020B0604030504040204" pitchFamily="50" charset="-128"/>
                 <a:ea typeface="メイリオ" panose="020B0604030504040204" pitchFamily="50" charset="-128"/>
               </a:rPr>
-              <a:t>合う業務に就く</a:t>
+              <a:t>（シフトは自己申告制）</a:t>
             </a:r>
             <a:endParaRPr lang="ja-JP" altLang="en-US" sz="1200" dirty="0"/>
           </a:p>
@@ -3685,7 +3685,7 @@
                           <a:latin typeface="メイリオ" panose="020B0604030504040204" pitchFamily="50" charset="-128"/>
                           <a:ea typeface="メイリオ" panose="020B0604030504040204" pitchFamily="50" charset="-128"/>
                         </a:rPr>
-                        <a:t>いただいている情報</a:t>
+                        <a:t>いただいている情報・確認したいこと</a:t>
                       </a:r>
                       <a:endParaRPr lang="ja-JP" altLang="en-US" sz="1050" dirty="0"/>
                     </a:p>
@@ -4757,7 +4757,7 @@
                 <a:ea typeface="メイリオ"/>
                 <a:cs typeface="メイリオ"/>
               </a:rPr>
-              <a:t>出典｜LINEヤフー 媒体データ（検索の前後行動）。起点キーワード「単発バイト」・直近1年間（2025年3月17日〜2026年3月22日）。分類は弊社</a:t>
+              <a:t>出典｜LINEヤフー 媒体データ（検索の前後行動）。起点キーワード「単発バイト」・期間2025年3月17日〜2026年3月22日。分類は弊社</a:t>
             </a:r>
           </a:p>
         </p:txBody>
@@ -5672,7 +5672,7 @@
                 <a:ea typeface="メイリオ"/>
                 <a:cs typeface="メイリオ"/>
               </a:rPr>
-              <a:t>出典｜LINE国内MAU・メッセージ開封率：LINEヤフー公式値。※応募から勤務までの実施率・再応募率は公開データがなく、貴社での計測が必要です</a:t>
+              <a:t>出典｜LINEの月間利用者数・メッセージ開封率：LINEヤフー公式値。※応募から勤務までの実施率・再応募率は公開データがなく、貴社での計測が必要です</a:t>
             </a:r>
           </a:p>
         </p:txBody>
@@ -5810,7 +5810,7 @@
                 <a:latin typeface="メイリオ" panose="020B0604030504040204" pitchFamily="50" charset="-128"/>
                 <a:ea typeface="メイリオ" panose="020B0604030504040204" pitchFamily="50" charset="-128"/>
               </a:rPr>
-              <a:t>起きやすいこと（一般的な傾向）</a:t>
+              <a:t>起きやすいこと（想定）</a:t>
             </a:r>
             <a:endParaRPr lang="ja-JP" altLang="en-US" sz="1150" dirty="0"/>
           </a:p>
@@ -6038,7 +6038,7 @@
                 <a:latin typeface="メイリオ" panose="020B0604030504040204" pitchFamily="50" charset="-128"/>
                 <a:ea typeface="メイリオ" panose="020B0604030504040204" pitchFamily="50" charset="-128"/>
               </a:rPr>
-              <a:t>起きやすいこと（一般的な傾向）</a:t>
+              <a:t>起きやすいこと（想定）</a:t>
             </a:r>
             <a:endParaRPr lang="ja-JP" altLang="en-US" sz="1150" dirty="0"/>
           </a:p>
@@ -6266,7 +6266,7 @@
                 <a:latin typeface="メイリオ" panose="020B0604030504040204" pitchFamily="50" charset="-128"/>
                 <a:ea typeface="メイリオ" panose="020B0604030504040204" pitchFamily="50" charset="-128"/>
               </a:rPr>
-              <a:t>起きやすいこと（一般的な傾向）</a:t>
+              <a:t>起きやすいこと（想定）</a:t>
             </a:r>
             <a:endParaRPr lang="ja-JP" altLang="en-US" sz="1150" dirty="0"/>
           </a:p>
@@ -6624,7 +6624,7 @@
                 <a:latin typeface="メイリオ" panose="020B0604030504040204" pitchFamily="50" charset="-128"/>
                 <a:ea typeface="メイリオ" panose="020B0604030504040204" pitchFamily="50" charset="-128"/>
               </a:rPr>
-              <a:t>LINE国内MAU</a:t>
+              <a:t>LINEの国内の月間利用者数</a:t>
             </a:r>
             <a:endParaRPr lang="ja-JP" altLang="en-US" sz="1100" dirty="0"/>
           </a:p>
@@ -6793,7 +6793,7 @@
                 <a:ea typeface="メイリオ"/>
                 <a:cs typeface="メイリオ"/>
               </a:rPr>
-              <a:t>3社とも、LINEを応募の受付だけでなく、登録・選考・勤務のやり取りに使っています。</a:t>
+              <a:t>登録（ムーヴ）・選考（ワントゥワン）・勤務（ステッドワン）のやり取りに、それぞれLINEを使っています。</a:t>
             </a:r>
           </a:p>
           <a:p>
@@ -6852,7 +6852,7 @@
                 <a:ea typeface="メイリオ"/>
                 <a:cs typeface="メイリオ"/>
               </a:rPr>
-              <a:t>画面：各社のLINE公式アカウント（2026年10月 弊社確認）。個人名はぼかしています</a:t>
+              <a:t>画面：各社のLINE公式アカウント（2026年10月 弊社確認）。個人名は消しています</a:t>
             </a:r>
           </a:p>
         </p:txBody>
@@ -7000,7 +7000,7 @@
                 <a:latin typeface="メイリオ" panose="020B0604030504040204" pitchFamily="50" charset="-128"/>
                 <a:ea typeface="メイリオ" panose="020B0604030504040204" pitchFamily="50" charset="-128"/>
               </a:rPr>
-              <a:t>・登録の手順を4つに分けて案内</a:t>
+              <a:t>・お仕事開始までの手順を4つで案内</a:t>
             </a:r>
             <a:endParaRPr lang="ja-JP" altLang="en-US" sz="1050" dirty="0"/>
           </a:p>
@@ -7520,7 +7520,7 @@
                 <a:ea typeface="メイリオ"/>
                 <a:cs typeface="メイリオ"/>
               </a:rPr>
-              <a:t>応募受付だけでなく、スタッフとの継続的な接点にLINEを活用する余地があります。</a:t>
+              <a:t>応募の受付だけでなく、勤務の連絡や次の募集まで、スタッフとの継続的な接点にLINEを活用できます。</a:t>
             </a:r>
           </a:p>
           <a:p>
@@ -7681,17 +7681,17 @@
         </p:nvGraphicFramePr>
         <p:xfrm>
           <a:off x="429768" y="1371600"/>
-          <a:ext cx="9043415" cy="3401568"/>
+          <a:ext cx="9043416" cy="3401568"/>
         </p:xfrm>
         <a:graphic>
           <a:graphicData uri="http://schemas.openxmlformats.org/drawingml/2006/table">
             <a:tbl>
               <a:tblPr/>
               <a:tblGrid>
-                <a:gridCol w="1325880"/>
+                <a:gridCol w="1463040"/>
+                <a:gridCol w="1783080"/>
+                <a:gridCol w="1645920"/>
                 <a:gridCol w="1828800"/>
-                <a:gridCol w="1691640"/>
-                <a:gridCol w="1874519"/>
                 <a:gridCol w="2322576"/>
               </a:tblGrid>
               <a:tr h="329184">
@@ -8091,7 +8091,7 @@
                           <a:latin typeface="メイリオ" panose="020B0604030504040204" pitchFamily="50" charset="-128"/>
                           <a:ea typeface="メイリオ" panose="020B0604030504040204" pitchFamily="50" charset="-128"/>
                         </a:rPr>
-                        <a:t>登録までの手順を4つで案内</a:t>
+                        <a:t>お仕事開始までの手順を4つで案内</a:t>
                       </a:r>
                       <a:endParaRPr lang="ja-JP" altLang="en-US" sz="1000" dirty="0"/>
                     </a:p>
@@ -9959,7 +9959,7 @@
                 <a:latin typeface="メイリオ" panose="020B0604030504040204" pitchFamily="50" charset="-128"/>
                 <a:ea typeface="メイリオ" panose="020B0604030504040204" pitchFamily="50" charset="-128"/>
               </a:rPr>
-              <a:t>参考｜タウンワーク（求人メディア）は、LINEを求人検索の入口に活用し、リッチメニュー経由の応募数が＋79%（2019年公開の導入事例）。直接の競合ではなく、LINEを応募の入口にした参考事例です。</a:t>
+              <a:t>参考｜タウンワーク（求人メディア）は、LINEを求人検索の入口に活用して、リッチメニュー経由の応募数が79%増えました（2019年公開の導入事例）。直接の競合ではなく、LINEを応募の入口にした参考事例です。</a:t>
             </a:r>
             <a:endParaRPr lang="ja-JP" altLang="en-US" sz="1000" dirty="0"/>
           </a:p>
@@ -10899,7 +10899,7 @@
                 <a:latin typeface="メイリオ" panose="020B0604030504040204" pitchFamily="50" charset="-128"/>
                 <a:ea typeface="メイリオ" panose="020B0604030504040204" pitchFamily="50" charset="-128"/>
               </a:rPr>
-              <a:t>応募の時点で友だちになり、イベントが終わっても接点が残る。登録スタッフの皆さまに、次の募集が届きます。</a:t>
+              <a:t>応募の時点で友だちになるので、イベントが終わっても次の募集が届きます。</a:t>
             </a:r>
             <a:endParaRPr lang="ja-JP" altLang="en-US" sz="1100" dirty="0"/>
           </a:p>
@@ -12875,7 +12875,7 @@
         <p:spPr>
           <a:xfrm>
             <a:off x="4180597" y="1172815"/>
-            <a:ext cx="3833883" cy="230832"/>
+            <a:ext cx="4937760" cy="384048"/>
           </a:xfrm>
           <a:prstGeom prst="rect">
             <a:avLst/>
@@ -12891,50 +12891,14 @@
             <a:r>
               <a:rPr lang="en-US" altLang="ja-JP" sz="900" dirty="0">
                 <a:solidFill>
-                  <a:srgbClr val="FF0000"/>
+                  <a:srgbClr val="595959"/>
                 </a:solidFill>
                 <a:latin typeface="メイリオ" panose="020B0604030504040204" pitchFamily="50" charset="-128"/>
                 <a:ea typeface="メイリオ" panose="020B0604030504040204" pitchFamily="50" charset="-128"/>
                 <a:cs typeface="メイリオ"/>
                 <a:sym typeface="Meiryo"/>
               </a:rPr>
-              <a:t>※</a:t>
-            </a:r>
-            <a:r>
-              <a:rPr lang="ja-JP" altLang="en-US" sz="900" dirty="0">
-                <a:solidFill>
-                  <a:srgbClr val="FF0000"/>
-                </a:solidFill>
-                <a:latin typeface="メイリオ" panose="020B0604030504040204" pitchFamily="50" charset="-128"/>
-                <a:ea typeface="メイリオ" panose="020B0604030504040204" pitchFamily="50" charset="-128"/>
-                <a:cs typeface="メイリオ"/>
-                <a:sym typeface="Meiryo"/>
-              </a:rPr>
-              <a:t>既存</a:t>
-            </a:r>
-            <a:r>
-              <a:rPr lang="en-US" altLang="ja-JP" sz="900" dirty="0">
-                <a:solidFill>
-                  <a:srgbClr val="FF0000"/>
-                </a:solidFill>
-                <a:latin typeface="メイリオ" panose="020B0604030504040204" pitchFamily="50" charset="-128"/>
-                <a:ea typeface="メイリオ" panose="020B0604030504040204" pitchFamily="50" charset="-128"/>
-                <a:cs typeface="メイリオ"/>
-                <a:sym typeface="Meiryo"/>
-              </a:rPr>
-              <a:t>API</a:t>
-            </a:r>
-            <a:r>
-              <a:rPr lang="ja-JP" altLang="en-US" sz="900" dirty="0">
-                <a:solidFill>
-                  <a:srgbClr val="FF0000"/>
-                </a:solidFill>
-                <a:latin typeface="メイリオ" panose="020B0604030504040204" pitchFamily="50" charset="-128"/>
-                <a:ea typeface="メイリオ" panose="020B0604030504040204" pitchFamily="50" charset="-128"/>
-                <a:cs typeface="メイリオ"/>
-                <a:sym typeface="Meiryo"/>
-              </a:rPr>
-              <a:t>ツールとの併用についても、問題なく稼働が可能。</a:t>
+              <a:t>※画面は動作のイメージです（他業種の例）。ほかのツールと併用できるかも、事前に確認します。</a:t>
             </a:r>
             <a:endParaRPr lang="ja-JP" altLang="en-US" sz="900" dirty="0">
               <a:solidFill>
@@ -13688,7 +13652,7 @@
         </p:nvSpPr>
         <p:spPr>
           <a:xfrm>
-            <a:off x="429768" y="5385816"/>
+            <a:off x="429768" y="5340096"/>
             <a:ext cx="4846320" cy="1143000"/>
           </a:xfrm>
           <a:prstGeom prst="roundRect">
@@ -17036,7 +17000,7 @@
                 <a:latin typeface="メイリオ" panose="020B0604030504040204" pitchFamily="50" charset="-128"/>
                 <a:ea typeface="メイリオ" panose="020B0604030504040204" pitchFamily="50" charset="-128"/>
               </a:rPr>
-              <a:t>会場・集合場所・集合時間・持ち物・服装</a:t>
+              <a:t>会場・集合場所と時間・持ち物・服装</a:t>
             </a:r>
             <a:endParaRPr lang="ja-JP" altLang="en-US" sz="1100" dirty="0"/>
           </a:p>
@@ -17856,7 +17820,7 @@
                 <a:ea typeface="メイリオ"/>
                 <a:cs typeface="メイリオ"/>
               </a:rPr>
-              <a:t>合わない募集が届かないので、ブロックを抑え、配信の手間も減らせます。</a:t>
+              <a:t>合わない募集が届かないので、ブロックを抑えることが期待できます。</a:t>
             </a:r>
           </a:p>
         </p:txBody>
@@ -17958,7 +17922,7 @@
         </p:nvGraphicFramePr>
         <p:xfrm>
           <a:off x="429768" y="1371600"/>
-          <a:ext cx="4937760" cy="3072384"/>
+          <a:ext cx="4937760" cy="2889504"/>
         </p:xfrm>
         <a:graphic>
           <a:graphicData uri="http://schemas.openxmlformats.org/drawingml/2006/table">
@@ -18160,7 +18124,7 @@
                   </a:tcPr>
                 </a:tc>
               </a:tr>
-              <a:tr h="548640">
+              <a:tr h="512064">
                 <a:tc>
                   <a:txBody>
                     <a:bodyPr/>
@@ -18351,7 +18315,7 @@
                   </a:tcPr>
                 </a:tc>
               </a:tr>
-              <a:tr h="548640">
+              <a:tr h="512064">
                 <a:tc>
                   <a:txBody>
                     <a:bodyPr/>
@@ -18542,7 +18506,7 @@
                   </a:tcPr>
                 </a:tc>
               </a:tr>
-              <a:tr h="548640">
+              <a:tr h="512064">
                 <a:tc>
                   <a:txBody>
                     <a:bodyPr/>
@@ -18733,7 +18697,7 @@
                   </a:tcPr>
                 </a:tc>
               </a:tr>
-              <a:tr h="548640">
+              <a:tr h="512064">
                 <a:tc>
                   <a:txBody>
                     <a:bodyPr/>
@@ -18924,7 +18888,7 @@
                   </a:tcPr>
                 </a:tc>
               </a:tr>
-              <a:tr h="548640">
+              <a:tr h="512064">
                 <a:tc>
                   <a:txBody>
                     <a:bodyPr/>
@@ -19127,8 +19091,8 @@
         </p:nvSpPr>
         <p:spPr>
           <a:xfrm>
-            <a:off x="429768" y="4526280"/>
-            <a:ext cx="4937760" cy="914400"/>
+            <a:off x="429768" y="4315968"/>
+            <a:ext cx="4937760" cy="1188720"/>
           </a:xfrm>
           <a:prstGeom prst="rect">
             <a:avLst/>
@@ -19146,40 +19110,59 @@
           <a:p>
             <a:pPr algn="l">
               <a:spcAft>
-                <a:spcPts val="200"/>
+                <a:spcPts val="100"/>
               </a:spcAft>
               <a:buNone/>
             </a:pPr>
             <a:r>
-              <a:rPr lang="ja-JP" altLang="en-US" sz="1000" b="0" dirty="0">
+              <a:rPr lang="ja-JP" altLang="en-US" sz="950" b="0" dirty="0">
                 <a:solidFill>
                   <a:srgbClr val="595959"/>
                 </a:solidFill>
                 <a:latin typeface="メイリオ" panose="020B0604030504040204" pitchFamily="50" charset="-128"/>
                 <a:ea typeface="メイリオ" panose="020B0604030504040204" pitchFamily="50" charset="-128"/>
               </a:rPr>
-              <a:t>※取れる情報から、段階的にタグを付けます。最初から高度なシステム連携は前提にしません。</a:t>
-            </a:r>
-            <a:endParaRPr lang="ja-JP" altLang="en-US" sz="1000" dirty="0"/>
+              <a:t>※再応募＝登録済みの方からの、次回イベントへの勤務希望（シフトの申告）も含みます。</a:t>
+            </a:r>
+            <a:endParaRPr lang="ja-JP" altLang="en-US" sz="950" dirty="0"/>
           </a:p>
           <a:p>
             <a:pPr algn="l">
               <a:spcAft>
-                <a:spcPts val="200"/>
+                <a:spcPts val="100"/>
               </a:spcAft>
               <a:buNone/>
             </a:pPr>
             <a:r>
-              <a:rPr lang="ja-JP" altLang="en-US" sz="1000" b="0" dirty="0">
+              <a:rPr lang="ja-JP" altLang="en-US" sz="950" b="0" dirty="0">
                 <a:solidFill>
                   <a:srgbClr val="595959"/>
                 </a:solidFill>
                 <a:latin typeface="メイリオ" panose="020B0604030504040204" pitchFamily="50" charset="-128"/>
                 <a:ea typeface="メイリオ" panose="020B0604030504040204" pitchFamily="50" charset="-128"/>
               </a:rPr>
+              <a:t>※取れる情報から、段階的にタグを付けます。最初から高度なシステム連携は前提にしません。</a:t>
+            </a:r>
+            <a:endParaRPr lang="ja-JP" altLang="en-US" sz="950" dirty="0"/>
+          </a:p>
+          <a:p>
+            <a:pPr algn="l">
+              <a:spcAft>
+                <a:spcPts val="100"/>
+              </a:spcAft>
+              <a:buNone/>
+            </a:pPr>
+            <a:r>
+              <a:rPr lang="ja-JP" altLang="en-US" sz="950" b="0" dirty="0">
+                <a:solidFill>
+                  <a:srgbClr val="595959"/>
+                </a:solidFill>
+                <a:latin typeface="メイリオ" panose="020B0604030504040204" pitchFamily="50" charset="-128"/>
+                <a:ea typeface="メイリオ" panose="020B0604030504040204" pitchFamily="50" charset="-128"/>
+              </a:rPr>
               <a:t>※勤務の履歴・希望条件をいまどこで管理しているかは確認事項です。</a:t>
             </a:r>
-            <a:endParaRPr lang="ja-JP" altLang="en-US" sz="1000" dirty="0"/>
+            <a:endParaRPr lang="ja-JP" altLang="en-US" sz="950" dirty="0"/>
           </a:p>
         </p:txBody>
       </p:sp>
@@ -20328,7 +20311,7 @@
                 <a:latin typeface="メイリオ" panose="020B0604030504040204" pitchFamily="50" charset="-128"/>
                 <a:ea typeface="メイリオ" panose="020B0604030504040204" pitchFamily="50" charset="-128"/>
               </a:rPr>
-              <a:t>【スタッフ募集｜横浜アリーナ】</a:t>
+              <a:t>【勤務者募集｜横浜アリーナ】</a:t>
             </a:r>
             <a:endParaRPr lang="ja-JP" altLang="en-US" sz="1050" dirty="0"/>
           </a:p>
@@ -20429,7 +20412,7 @@
                 <a:latin typeface="メイリオ" panose="020B0604030504040204" pitchFamily="50" charset="-128"/>
                 <a:ea typeface="メイリオ" panose="020B0604030504040204" pitchFamily="50" charset="-128"/>
               </a:rPr>
-              <a:t>募集の詳細を見る</a:t>
+              <a:t>勤務希望を出す</a:t>
             </a:r>
             <a:endParaRPr lang="ja-JP" altLang="en-US" sz="1100" dirty="0"/>
           </a:p>
@@ -21066,7 +21049,7 @@
                 <a:ea typeface="メイリオ"/>
                 <a:cs typeface="メイリオ"/>
               </a:rPr>
-              <a:t>目標・6か月SIM｜友だち獲得から再応募・再稼働まで（試算）</a:t>
+              <a:t>目標・6か月の試算（SIM）｜友だち獲得から再応募・再稼働まで</a:t>
             </a:r>
           </a:p>
         </p:txBody>
@@ -21107,7 +21090,7 @@
                 <a:ea typeface="メイリオ"/>
                 <a:cs typeface="メイリオ"/>
               </a:rPr>
-              <a:t>サイトUU 8,947を月間と仮置きし、仮定の率から6か月の見込みを試算しました。</a:t>
+              <a:t>サイトの訪問者数（UU）8,947を月間と仮置きし、仮定の率から6か月の見込みを試算しました。</a:t>
             </a:r>
           </a:p>
           <a:p>
@@ -23450,7 +23433,7 @@
                           <a:latin typeface="メイリオ" panose="020B0604030504040204" pitchFamily="50" charset="-128"/>
                           <a:ea typeface="メイリオ" panose="020B0604030504040204" pitchFamily="50" charset="-128"/>
                         </a:rPr>
-                        <a:t>配信できるスタッフ数</a:t>
+                        <a:t>配信できる友だち数</a:t>
                       </a:r>
                       <a:endParaRPr lang="ja-JP" altLang="en-US" sz="1050" dirty="0"/>
                     </a:p>
@@ -24019,7 +24002,7 @@
                           <a:latin typeface="メイリオ" panose="020B0604030504040204" pitchFamily="50" charset="-128"/>
                           <a:ea typeface="メイリオ" panose="020B0604030504040204" pitchFamily="50" charset="-128"/>
                         </a:rPr>
-                        <a:t>再応募件数</a:t>
+                        <a:t>再応募（勤務希望）</a:t>
                       </a:r>
                       <a:endParaRPr lang="ja-JP" altLang="en-US" sz="1050" dirty="0"/>
                     </a:p>
@@ -25297,7 +25280,7 @@
                 <a:latin typeface="メイリオ" panose="020B0604030504040204" pitchFamily="50" charset="-128"/>
                 <a:ea typeface="メイリオ" panose="020B0604030504040204" pitchFamily="50" charset="-128"/>
               </a:rPr>
-              <a:t>仮定（DYMが設定）</a:t>
+              <a:t>仮定（弊社で設定）</a:t>
             </a:r>
             <a:endParaRPr lang="ja-JP" altLang="en-US" sz="950" dirty="0"/>
           </a:p>
@@ -25354,7 +25337,7 @@
                 <a:latin typeface="メイリオ" panose="020B0604030504040204" pitchFamily="50" charset="-128"/>
                 <a:ea typeface="メイリオ" panose="020B0604030504040204" pitchFamily="50" charset="-128"/>
               </a:rPr>
-              <a:t>・ブロック率 30%／再応募率 月10%</a:t>
+              <a:t>・ブロック率 30%／再応募率 月10%／勤務決定率 70%</a:t>
             </a:r>
             <a:endParaRPr lang="ja-JP" altLang="en-US" sz="950" dirty="0"/>
           </a:p>
@@ -25373,7 +25356,7 @@
                 <a:latin typeface="メイリオ" panose="020B0604030504040204" pitchFamily="50" charset="-128"/>
                 <a:ea typeface="メイリオ" panose="020B0604030504040204" pitchFamily="50" charset="-128"/>
               </a:rPr>
-              <a:t>・勤務決定率 70%</a:t>
+              <a:t>※採用サイトの完了画面に設置できる前提</a:t>
             </a:r>
             <a:endParaRPr lang="ja-JP" altLang="en-US" sz="950" dirty="0"/>
           </a:p>
@@ -25443,7 +25426,7 @@
                 <a:latin typeface="メイリオ" panose="020B0604030504040204" pitchFamily="50" charset="-128"/>
                 <a:ea typeface="メイリオ" panose="020B0604030504040204" pitchFamily="50" charset="-128"/>
               </a:rPr>
-              <a:t>・今いる登録スタッフの友だち追加（人数未確認）</a:t>
+              <a:t>・今いる登録スタッフ（人数未確認）</a:t>
             </a:r>
             <a:endParaRPr lang="ja-JP" altLang="en-US" sz="950" dirty="0"/>
           </a:p>
@@ -25462,7 +25445,7 @@
                 <a:latin typeface="メイリオ" panose="020B0604030504040204" pitchFamily="50" charset="-128"/>
                 <a:ea typeface="メイリオ" panose="020B0604030504040204" pitchFamily="50" charset="-128"/>
               </a:rPr>
-              <a:t>・求人媒体経由の応募（同じ完了画面なら増える）</a:t>
+              <a:t>・求人媒体経由の応募</a:t>
             </a:r>
             <a:endParaRPr lang="ja-JP" altLang="en-US" sz="950" dirty="0"/>
           </a:p>
@@ -25481,7 +25464,7 @@
                 <a:latin typeface="メイリオ" panose="020B0604030504040204" pitchFamily="50" charset="-128"/>
                 <a:ea typeface="メイリオ" panose="020B0604030504040204" pitchFamily="50" charset="-128"/>
               </a:rPr>
-              <a:t>・勤務連絡の効率化（時間の削減は数値化しない）</a:t>
+              <a:t>・勤務連絡の効率化（時間の削減）</a:t>
             </a:r>
             <a:endParaRPr lang="ja-JP" altLang="en-US" sz="950" dirty="0"/>
           </a:p>
@@ -25523,7 +25506,7 @@
                 <a:latin typeface="メイリオ" panose="020B0604030504040204" pitchFamily="50" charset="-128"/>
                 <a:ea typeface="メイリオ" panose="020B0604030504040204" pitchFamily="50" charset="-128"/>
               </a:rPr>
-              <a:t>※試算であり、成果を保証するものではありません。広告経由と自然流入は区別していません。人数・件数は小数点以下を四捨五入しています。</a:t>
+              <a:t>※試算であり、成果を保証するものではありません。1か月目＝運用開始の月（構築の完了後）。広告経由と自然流入は区別していません。人数・件数は小数点以下を四捨五入しています。</a:t>
             </a:r>
             <a:endParaRPr lang="ja-JP" altLang="en-US" sz="950" dirty="0"/>
           </a:p>
@@ -25690,7 +25673,7 @@
                 <a:ea typeface="メイリオ"/>
                 <a:cs typeface="メイリオ"/>
               </a:rPr>
-              <a:t>※税抜。施策内容・配信本数・連携範囲により、費用は個別にお見積りします。LINE公式アカウントの利用料は配信数により変わります。</a:t>
+              <a:t>※税抜。施策内容・配信本数・連携範囲により、費用は個別にお見積りします。LINE公式アカウントの利用料は配信数により変わります。勤務前の案内はイベントごとに送るため、月6本の配信とは別に運用します（送信の担当はご相談のうえ決定）。</a:t>
             </a:r>
           </a:p>
         </p:txBody>
@@ -26950,7 +26933,7 @@
         <p:spPr>
           <a:xfrm>
             <a:off x="5367528" y="1783080"/>
-            <a:ext cx="4105656" cy="1115568"/>
+            <a:ext cx="4105656" cy="1188720"/>
           </a:xfrm>
           <a:prstGeom prst="roundRect">
             <a:avLst>
@@ -26974,7 +26957,7 @@
           <a:p>
             <a:pPr algn="l">
               <a:spcAft>
-                <a:spcPts val="200"/>
+                <a:spcPts val="100"/>
               </a:spcAft>
               <a:buNone/>
             </a:pPr>
@@ -26993,7 +26976,7 @@
           <a:p>
             <a:pPr algn="l">
               <a:spcAft>
-                <a:spcPts val="200"/>
+                <a:spcPts val="100"/>
               </a:spcAft>
               <a:buNone/>
             </a:pPr>
@@ -27012,7 +26995,7 @@
           <a:p>
             <a:pPr algn="l">
               <a:spcAft>
-                <a:spcPts val="200"/>
+                <a:spcPts val="100"/>
               </a:spcAft>
               <a:buNone/>
             </a:pPr>
@@ -27024,7 +27007,26 @@
                 <a:latin typeface="メイリオ" panose="020B0604030504040204" pitchFamily="50" charset="-128"/>
                 <a:ea typeface="メイリオ" panose="020B0604030504040204" pitchFamily="50" charset="-128"/>
               </a:rPr>
-              <a:t>・サンクスLINE誘導の導入・設定／月次レポート・改善提案</a:t>
+              <a:t>・サンクスLINE誘導の導入・設定／勤務前の案内の型づくり</a:t>
+            </a:r>
+            <a:endParaRPr lang="ja-JP" altLang="en-US" sz="1050" dirty="0"/>
+          </a:p>
+          <a:p>
+            <a:pPr algn="l">
+              <a:spcAft>
+                <a:spcPts val="100"/>
+              </a:spcAft>
+              <a:buNone/>
+            </a:pPr>
+            <a:r>
+              <a:rPr lang="ja-JP" altLang="en-US" sz="1050" b="0" dirty="0">
+                <a:solidFill>
+                  <a:srgbClr val="333333"/>
+                </a:solidFill>
+                <a:latin typeface="メイリオ" panose="020B0604030504040204" pitchFamily="50" charset="-128"/>
+                <a:ea typeface="メイリオ" panose="020B0604030504040204" pitchFamily="50" charset="-128"/>
+              </a:rPr>
+              <a:t>・月次レポート・改善のご提案</a:t>
             </a:r>
             <a:endParaRPr lang="ja-JP" altLang="en-US" sz="1050" dirty="0"/>
           </a:p>
@@ -27038,8 +27040,8 @@
         </p:nvSpPr>
         <p:spPr>
           <a:xfrm>
-            <a:off x="5367528" y="2971800"/>
-            <a:ext cx="4105656" cy="1207008"/>
+            <a:off x="5367528" y="3063240"/>
+            <a:ext cx="4105656" cy="1143000"/>
           </a:xfrm>
           <a:prstGeom prst="roundRect">
             <a:avLst>
@@ -27063,7 +27065,7 @@
           <a:p>
             <a:pPr algn="l">
               <a:spcAft>
-                <a:spcPts val="200"/>
+                <a:spcPts val="100"/>
               </a:spcAft>
               <a:buNone/>
             </a:pPr>
@@ -27082,7 +27084,7 @@
           <a:p>
             <a:pPr algn="l">
               <a:spcAft>
-                <a:spcPts val="200"/>
+                <a:spcPts val="100"/>
               </a:spcAft>
               <a:buNone/>
             </a:pPr>
@@ -27101,7 +27103,7 @@
           <a:p>
             <a:pPr algn="l">
               <a:spcAft>
-                <a:spcPts val="200"/>
+                <a:spcPts val="100"/>
               </a:spcAft>
               <a:buNone/>
             </a:pPr>
@@ -27113,14 +27115,14 @@
                 <a:latin typeface="メイリオ" panose="020B0604030504040204" pitchFamily="50" charset="-128"/>
                 <a:ea typeface="メイリオ" panose="020B0604030504040204" pitchFamily="50" charset="-128"/>
               </a:rPr>
-              <a:t>・個別のチャット対応（変更・欠席の連絡など）</a:t>
+              <a:t>・勤務前の案内の送信（型を使ってイベントごとに）</a:t>
             </a:r>
             <a:endParaRPr lang="ja-JP" altLang="en-US" sz="1050" dirty="0"/>
           </a:p>
           <a:p>
             <a:pPr algn="l">
               <a:spcAft>
-                <a:spcPts val="200"/>
+                <a:spcPts val="100"/>
               </a:spcAft>
               <a:buNone/>
             </a:pPr>
@@ -27132,7 +27134,7 @@
                 <a:latin typeface="メイリオ" panose="020B0604030504040204" pitchFamily="50" charset="-128"/>
                 <a:ea typeface="メイリオ" panose="020B0604030504040204" pitchFamily="50" charset="-128"/>
               </a:rPr>
-              <a:t>・応募フォームへの設置のご協力</a:t>
+              <a:t>・個別のチャット対応・応募フォームへの設置のご協力</a:t>
             </a:r>
             <a:endParaRPr lang="ja-JP" altLang="en-US" sz="1050" dirty="0"/>
           </a:p>
@@ -27477,7 +27479,7 @@
                 <a:latin typeface="メイリオ" panose="020B0604030504040204" pitchFamily="50" charset="-128"/>
                 <a:ea typeface="メイリオ" panose="020B0604030504040204" pitchFamily="50" charset="-128"/>
               </a:rPr>
-              <a:t>STEP1｜構築（1〜2か月目）</a:t>
+              <a:t>STEP1｜構築（運用開始の前）</a:t>
             </a:r>
             <a:endParaRPr lang="ja-JP" altLang="en-US" sz="1000" dirty="0"/>
           </a:p>
@@ -27629,7 +27631,7 @@
                 <a:latin typeface="メイリオ" panose="020B0604030504040204" pitchFamily="50" charset="-128"/>
                 <a:ea typeface="メイリオ" panose="020B0604030504040204" pitchFamily="50" charset="-128"/>
               </a:rPr>
-              <a:t>STEP2｜運用・検証（3〜6か月目）</a:t>
+              <a:t>STEP2｜運用・検証（1〜6か月目）</a:t>
             </a:r>
             <a:endParaRPr lang="ja-JP" altLang="en-US" sz="1000" dirty="0"/>
           </a:p>
@@ -27699,7 +27701,7 @@
                 <a:latin typeface="メイリオ" panose="020B0604030504040204" pitchFamily="50" charset="-128"/>
                 <a:ea typeface="メイリオ" panose="020B0604030504040204" pitchFamily="50" charset="-128"/>
               </a:rPr>
-              <a:t>・再応募・再稼働の計測</a:t>
+              <a:t>・再応募・再稼働の計測（LINEからの勤務希望の数）</a:t>
             </a:r>
             <a:endParaRPr lang="ja-JP" altLang="en-US" sz="1100" dirty="0"/>
           </a:p>
